--- a/slides/slide_10.pptx
+++ b/slides/slide_10.pptx
@@ -26,61 +26,38 @@
       <p:bold r:id="rId9"/>
     </p:embeddedFont>
     <p:embeddedFont>
-      <p:font typeface="Bebas Neue" panose="020B0606020202050201" pitchFamily="2" charset="0"/>
+      <p:font typeface="Hanken Grotesk" panose="020B0604020202020204" charset="0"/>
       <p:regular r:id="rId10"/>
-    </p:embeddedFont>
-    <p:embeddedFont>
-      <p:font typeface="DM Mono" panose="020B0509040201040103" pitchFamily="1" charset="0"/>
-      <p:regular r:id="rId11"/>
+      <p:bold r:id="rId11"/>
       <p:italic r:id="rId12"/>
-    </p:embeddedFont>
-    <p:embeddedFont>
-      <p:font typeface="Hanken Grotesk" panose="020B0604020202020204" charset="0"/>
-      <p:regular r:id="rId13"/>
-      <p:bold r:id="rId14"/>
-      <p:italic r:id="rId15"/>
-      <p:boldItalic r:id="rId16"/>
-    </p:embeddedFont>
-    <p:embeddedFont>
-      <p:font typeface="Open Sans" panose="020B0606030504020204" pitchFamily="2" charset="0"/>
-      <p:regular r:id="rId17"/>
-      <p:bold r:id="rId18"/>
-      <p:italic r:id="rId19"/>
-      <p:boldItalic r:id="rId20"/>
+      <p:boldItalic r:id="rId13"/>
     </p:embeddedFont>
     <p:embeddedFont>
       <p:font typeface="Raleway" pitchFamily="2" charset="0"/>
-      <p:regular r:id="rId21"/>
-      <p:bold r:id="rId22"/>
-      <p:italic r:id="rId23"/>
-      <p:boldItalic r:id="rId24"/>
+      <p:regular r:id="rId14"/>
+      <p:bold r:id="rId15"/>
+      <p:italic r:id="rId16"/>
+      <p:boldItalic r:id="rId17"/>
     </p:embeddedFont>
     <p:embeddedFont>
       <p:font typeface="Raleway Black" pitchFamily="2" charset="0"/>
-      <p:bold r:id="rId25"/>
-      <p:boldItalic r:id="rId26"/>
+      <p:bold r:id="rId18"/>
+      <p:boldItalic r:id="rId19"/>
     </p:embeddedFont>
     <p:embeddedFont>
       <p:font typeface="Raleway ExtraBold" pitchFamily="2" charset="0"/>
-      <p:bold r:id="rId27"/>
-      <p:boldItalic r:id="rId28"/>
+      <p:bold r:id="rId20"/>
+      <p:boldItalic r:id="rId21"/>
     </p:embeddedFont>
     <p:embeddedFont>
       <p:font typeface="Roboto Medium" panose="02000000000000000000" pitchFamily="2" charset="0"/>
-      <p:regular r:id="rId29"/>
-      <p:italic r:id="rId30"/>
+      <p:regular r:id="rId22"/>
+      <p:italic r:id="rId23"/>
     </p:embeddedFont>
     <p:embeddedFont>
       <p:font typeface="Roboto" panose="02000000000000000000" pitchFamily="2"/>
-      <p:bold r:id="rId31"/>
-      <p:boldItalic r:id="rId32"/>
-    </p:embeddedFont>
-    <p:embeddedFont>
-      <p:font typeface="Segoe UI" panose="020B0502040204020203" pitchFamily="2" charset="0"/>
-      <p:regular r:id="rId33"/>
-      <p:bold r:id="rId34"/>
-      <p:italic r:id="rId35"/>
-      <p:boldItalic r:id="rId36"/>
+      <p:bold r:id="rId24"/>
+      <p:boldItalic r:id="rId25"/>
     </p:embeddedFont>
   </p:embeddedFontLst>
   <p:custDataLst>
@@ -884,7 +861,7 @@
           <a:bodyPr/>
           <a:lstStyle/>
           <a:p>
-            <a:fld id="{958FB124-76EA-4502-B711-4AE6655D7B86}" type="datetimeFigureOut">
+            <a:fld id="{86A90248-2F55-4510-A851-1403E297A02B}" type="datetimeFigureOut">
               <a:rPr lang="en-US" smtClean="0"/>
               <a:t>11/7/2009</a:t>
             </a:fld>
@@ -1048,7 +1025,7 @@
           <a:bodyPr/>
           <a:lstStyle/>
           <a:p>
-            <a:fld id="{4DCD7182-18C9-489C-9D6D-AB93E5BB1164}" type="datetimeFigureOut">
+            <a:fld id="{1E9B8D3C-1E24-4DD3-BFE3-57B687D104B6}" type="datetimeFigureOut">
               <a:rPr lang="en-US" smtClean="0"/>
               <a:t>11/7/2009</a:t>
             </a:fld>
@@ -1212,7 +1189,7 @@
           <a:bodyPr/>
           <a:lstStyle/>
           <a:p>
-            <a:fld id="{E511D38F-12CF-4689-8EC8-08F15E4E7903}" type="datetimeFigureOut">
+            <a:fld id="{455EB620-0AF0-4D24-A4FD-5E8A526A7BB2}" type="datetimeFigureOut">
               <a:rPr lang="en-US" smtClean="0"/>
               <a:t>11/7/2009</a:t>
             </a:fld>
@@ -13117,7 +13094,7 @@
           <a:bodyPr/>
           <a:lstStyle/>
           <a:p>
-            <a:fld id="{5280AC7A-C06B-4B48-9426-AE6ED1BB7473}" type="datetimeFigureOut">
+            <a:fld id="{58F757D4-0DA2-44BC-B1AD-0746379C81CD}" type="datetimeFigureOut">
               <a:rPr lang="en-US" smtClean="0"/>
               <a:t>11/7/2009</a:t>
             </a:fld>
@@ -33218,7 +33195,7 @@
           <a:bodyPr/>
           <a:lstStyle/>
           <a:p>
-            <a:fld id="{99AD392F-58C1-48C2-B14F-685BA4E57952}" type="datetimeFigureOut">
+            <a:fld id="{4FEABF23-5D9D-47A5-9CE7-4BAE043F2B7D}" type="datetimeFigureOut">
               <a:rPr lang="en-US" smtClean="0"/>
               <a:t>11/7/2009</a:t>
             </a:fld>
@@ -38865,7 +38842,7 @@
           <a:bodyPr/>
           <a:lstStyle/>
           <a:p>
-            <a:fld id="{5EF7B4E3-2BA0-404D-89EF-DAB725A38847}" type="datetimeFigureOut">
+            <a:fld id="{D74E97F7-5E70-4921-9C77-3ECAC79813B4}" type="datetimeFigureOut">
               <a:rPr lang="en-US" smtClean="0"/>
               <a:t>11/7/2009</a:t>
             </a:fld>
@@ -39254,7 +39231,7 @@
           <a:bodyPr/>
           <a:lstStyle/>
           <a:p>
-            <a:fld id="{9E8360CD-A0BF-4553-8620-183F76E7D870}" type="datetimeFigureOut">
+            <a:fld id="{3508B06C-859A-4A51-B7C1-21DF2DF67FBA}" type="datetimeFigureOut">
               <a:rPr lang="en-US" smtClean="0"/>
               <a:t>11/7/2009</a:t>
             </a:fld>
@@ -39367,7 +39344,7 @@
           <a:bodyPr/>
           <a:lstStyle/>
           <a:p>
-            <a:fld id="{FB0348D5-2B8C-4DD3-855D-10DB5718210B}" type="datetimeFigureOut">
+            <a:fld id="{86ACAE3F-28EF-4E83-AAB2-A7BCDDB9E1E4}" type="datetimeFigureOut">
               <a:rPr lang="en-US" smtClean="0"/>
               <a:t>11/7/2009</a:t>
             </a:fld>
@@ -39457,7 +39434,7 @@
           <a:bodyPr/>
           <a:lstStyle/>
           <a:p>
-            <a:fld id="{3C828920-0834-4D04-A89E-870F7E0F8F4F}" type="datetimeFigureOut">
+            <a:fld id="{5E35BF11-454A-4B5F-B05B-2B592EF60C52}" type="datetimeFigureOut">
               <a:rPr lang="en-US" smtClean="0"/>
               <a:t>11/7/2009</a:t>
             </a:fld>
@@ -39712,7 +39689,7 @@
           <a:bodyPr/>
           <a:lstStyle/>
           <a:p>
-            <a:fld id="{9C3FD602-688E-48F6-9C7E-47B6527D961C}" type="datetimeFigureOut">
+            <a:fld id="{BF6BF3C2-B64F-4AC5-AAA0-D1BF2A602062}" type="datetimeFigureOut">
               <a:rPr lang="en-US" smtClean="0"/>
               <a:t>11/7/2009</a:t>
             </a:fld>
@@ -39944,7 +39921,7 @@
           <a:bodyPr/>
           <a:lstStyle/>
           <a:p>
-            <a:fld id="{81FCC2B6-8626-4275-8831-4CD5440FCB1B}" type="datetimeFigureOut">
+            <a:fld id="{81999541-AF74-486B-9AAB-9CFE58542EF1}" type="datetimeFigureOut">
               <a:rPr lang="en-US" smtClean="0"/>
               <a:t>11/7/2009</a:t>
             </a:fld>
@@ -41804,10 +41781,16 @@
           <a:lstStyle/>
           <a:p>
             <a:r>
-              <a:rPr lang="en"/>
+              <a:rPr lang="en" b="1">
+                <a:latin typeface="Arial"/>
+                <a:cs typeface="Arial"/>
+              </a:rPr>
               <a:t>СРАВНЕНИЕ КОНКУРЕНТОВ</a:t>
             </a:r>
-            <a:endParaRPr lang="ru-RU"/>
+            <a:endParaRPr lang="ru-RU" b="1">
+              <a:latin typeface="Arial"/>
+              <a:cs typeface="Arial"/>
+            </a:endParaRPr>
           </a:p>
           <a:p>
             <a:endParaRPr lang="en" sz="2600" b="0">
@@ -41827,7 +41810,7 @@
           <p:nvPr>
             <p:extLst>
               <p:ext uri="{D42A27DB-BD31-4B8C-83A1-F6EECF244321}">
-                <p14:modId val="1756597019"/>
+                <p14:modId val="475437144"/>
               </p:ext>
             </p:extLst>
           </p:nvPr>
@@ -41913,9 +41896,9 @@
                         <a:solidFill>
                           <a:schemeClr val="dk1"/>
                         </a:solidFill>
-                        <a:latin typeface="Bebas Neue"/>
+                        <a:latin typeface="Arial"/>
                         <a:ea typeface="Bebas Neue"/>
-                        <a:cs typeface="Bebas Neue"/>
+                        <a:cs typeface="Arial"/>
                         <a:sym typeface="Bebas Neue"/>
                       </a:endParaRPr>
                     </a:p>
@@ -41981,23 +41964,23 @@
                         <a:buNone/>
                       </a:pPr>
                       <a:r>
-                        <a:rPr lang="en" sz="1200" b="1" err="1">
+                        <a:rPr lang="en" sz="1100" b="1" err="1">
                           <a:solidFill>
                             <a:schemeClr val="dk1"/>
                           </a:solidFill>
-                          <a:latin typeface="Raleway"/>
+                          <a:latin typeface="Arial"/>
                           <a:ea typeface="Raleway"/>
-                          <a:cs typeface="Raleway"/>
+                          <a:cs typeface="Arial"/>
                         </a:rPr>
                         <a:t>Особенности</a:t>
                       </a:r>
-                      <a:endParaRPr lang="en" sz="1200" b="1" err="1">
+                      <a:endParaRPr lang="en" sz="1100" b="1" err="1">
                         <a:solidFill>
                           <a:schemeClr val="dk1"/>
                         </a:solidFill>
-                        <a:latin typeface="Raleway"/>
+                        <a:latin typeface="Arial"/>
                         <a:ea typeface="Raleway"/>
-                        <a:cs typeface="Raleway"/>
+                        <a:cs typeface="Arial"/>
                         <a:sym typeface="Raleway"/>
                       </a:endParaRPr>
                     </a:p>
@@ -42061,23 +42044,23 @@
                         <a:buNone/>
                       </a:pPr>
                       <a:r>
-                        <a:rPr lang="en" sz="1200" b="1" err="1">
+                        <a:rPr lang="en" sz="1100" b="1" err="1">
                           <a:solidFill>
                             <a:schemeClr val="dk1"/>
                           </a:solidFill>
-                          <a:latin typeface="Raleway"/>
+                          <a:latin typeface="Arial"/>
                           <a:ea typeface="Raleway"/>
-                          <a:cs typeface="Raleway"/>
+                          <a:cs typeface="Arial"/>
                         </a:rPr>
                         <a:t>Ценность</a:t>
                       </a:r>
-                      <a:endParaRPr lang="en" sz="1200" b="1" err="1">
+                      <a:endParaRPr lang="en" sz="1100" b="1" err="1">
                         <a:solidFill>
                           <a:schemeClr val="dk1"/>
                         </a:solidFill>
-                        <a:latin typeface="Raleway"/>
+                        <a:latin typeface="Arial"/>
                         <a:ea typeface="Raleway"/>
-                        <a:cs typeface="Raleway"/>
+                        <a:cs typeface="Arial"/>
                         <a:sym typeface="Raleway"/>
                       </a:endParaRPr>
                     </a:p>
@@ -42146,23 +42129,23 @@
                         <a:buNone/>
                       </a:pPr>
                       <a:r>
-                        <a:rPr lang="en" sz="1200" b="1" err="1">
+                        <a:rPr lang="en" sz="1100" b="1" err="1">
                           <a:solidFill>
                             <a:schemeClr val="dk1"/>
                           </a:solidFill>
-                          <a:latin typeface="Raleway"/>
+                          <a:latin typeface="Arial"/>
                           <a:ea typeface="Raleway"/>
-                          <a:cs typeface="Raleway"/>
+                          <a:cs typeface="Arial"/>
                         </a:rPr>
                         <a:t>Стоимость</a:t>
                       </a:r>
-                      <a:endParaRPr lang="en" sz="1200" b="1" err="1">
+                      <a:endParaRPr lang="en" sz="1100" b="1" err="1">
                         <a:solidFill>
                           <a:schemeClr val="dk1"/>
                         </a:solidFill>
-                        <a:latin typeface="Raleway"/>
+                        <a:latin typeface="Arial"/>
                         <a:ea typeface="Raleway"/>
-                        <a:cs typeface="Raleway"/>
+                        <a:cs typeface="Arial"/>
                         <a:sym typeface="Raleway"/>
                       </a:endParaRPr>
                     </a:p>
@@ -42226,23 +42209,23 @@
                         <a:buNone/>
                       </a:pPr>
                       <a:r>
-                        <a:rPr lang="en" sz="1200" b="1" err="1">
+                        <a:rPr lang="en" sz="1100" b="1" err="1">
                           <a:solidFill>
                             <a:schemeClr val="dk1"/>
                           </a:solidFill>
-                          <a:latin typeface="Raleway"/>
+                          <a:latin typeface="Arial"/>
                           <a:ea typeface="Raleway"/>
-                          <a:cs typeface="Raleway"/>
+                          <a:cs typeface="Arial"/>
                         </a:rPr>
                         <a:t>Проба</a:t>
                       </a:r>
-                      <a:endParaRPr lang="en" sz="1200" b="1" err="1">
+                      <a:endParaRPr lang="en" sz="1100" b="1" err="1">
                         <a:solidFill>
                           <a:schemeClr val="dk1"/>
                         </a:solidFill>
-                        <a:latin typeface="Raleway"/>
+                        <a:latin typeface="Arial"/>
                         <a:ea typeface="Raleway"/>
-                        <a:cs typeface="Raleway"/>
+                        <a:cs typeface="Arial"/>
                         <a:sym typeface="Raleway"/>
                       </a:endParaRPr>
                     </a:p>
@@ -42306,23 +42289,23 @@
                         <a:buNone/>
                       </a:pPr>
                       <a:r>
-                        <a:rPr lang="en" sz="1200" b="1" err="1">
+                        <a:rPr lang="en" sz="1100" b="1" err="1">
                           <a:solidFill>
                             <a:schemeClr val="dk1"/>
                           </a:solidFill>
-                          <a:latin typeface="Raleway"/>
+                          <a:latin typeface="Arial"/>
                           <a:ea typeface="Raleway"/>
-                          <a:cs typeface="Raleway"/>
+                          <a:cs typeface="Arial"/>
                         </a:rPr>
                         <a:t>Компетентность</a:t>
                       </a:r>
-                      <a:endParaRPr lang="en" sz="1200" b="1" err="1">
+                      <a:endParaRPr lang="en" sz="1100" b="1" err="1">
                         <a:solidFill>
                           <a:schemeClr val="dk1"/>
                         </a:solidFill>
-                        <a:latin typeface="Raleway"/>
+                        <a:latin typeface="Arial"/>
                         <a:ea typeface="Raleway"/>
-                        <a:cs typeface="Raleway"/>
+                        <a:cs typeface="Arial"/>
                         <a:sym typeface="Raleway"/>
                       </a:endParaRPr>
                     </a:p>
@@ -42386,23 +42369,23 @@
                         <a:buNone/>
                       </a:pPr>
                       <a:r>
-                        <a:rPr lang="en" sz="1200" b="1" err="1">
+                        <a:rPr lang="en" sz="1100" b="1" err="1">
                           <a:solidFill>
                             <a:schemeClr val="dk1"/>
                           </a:solidFill>
-                          <a:latin typeface="Raleway"/>
+                          <a:latin typeface="Arial"/>
                           <a:ea typeface="Raleway"/>
-                          <a:cs typeface="Raleway"/>
+                          <a:cs typeface="Arial"/>
                         </a:rPr>
                         <a:t>Доля</a:t>
                       </a:r>
-                      <a:endParaRPr lang="en" sz="1200" b="1" err="1">
+                      <a:endParaRPr lang="en" sz="1100" b="1" err="1">
                         <a:solidFill>
                           <a:schemeClr val="dk1"/>
                         </a:solidFill>
-                        <a:latin typeface="Raleway"/>
+                        <a:latin typeface="Arial"/>
                         <a:ea typeface="Raleway"/>
-                        <a:cs typeface="Raleway"/>
+                        <a:cs typeface="Arial"/>
                         <a:sym typeface="Raleway"/>
                       </a:endParaRPr>
                     </a:p>
@@ -42477,9 +42460,9 @@
                           <a:solidFill>
                             <a:schemeClr val="dk1"/>
                           </a:solidFill>
-                          <a:latin typeface="Hanken Grotesk"/>
+                          <a:latin typeface="Arial"/>
                           <a:ea typeface="Hanken Grotesk"/>
-                          <a:cs typeface="Hanken Grotesk"/>
+                          <a:cs typeface="Arial"/>
                         </a:rPr>
                         <a:t>Компания</a:t>
                       </a:r>
@@ -42488,9 +42471,9 @@
                           <a:solidFill>
                             <a:schemeClr val="dk1"/>
                           </a:solidFill>
-                          <a:latin typeface="Hanken Grotesk"/>
+                          <a:latin typeface="Arial"/>
                           <a:ea typeface="Hanken Grotesk"/>
-                          <a:cs typeface="Hanken Grotesk"/>
+                          <a:cs typeface="Arial"/>
                           <a:sym typeface="Hanken Grotesk"/>
                         </a:rPr>
                         <a:t> A</a:t>
@@ -42499,9 +42482,9 @@
                         <a:solidFill>
                           <a:schemeClr val="dk1"/>
                         </a:solidFill>
-                        <a:latin typeface="Hanken Grotesk"/>
+                        <a:latin typeface="Arial"/>
                         <a:ea typeface="Hanken Grotesk"/>
-                        <a:cs typeface="Hanken Grotesk"/>
+                        <a:cs typeface="Arial"/>
                         <a:sym typeface="Hanken Grotesk"/>
                       </a:endParaRPr>
                     </a:p>
@@ -42567,9 +42550,9 @@
                           <a:solidFill>
                             <a:schemeClr val="dk1"/>
                           </a:solidFill>
-                          <a:latin typeface="Hanken Grotesk"/>
+                          <a:latin typeface="Arial"/>
                           <a:ea typeface="Hanken Grotesk"/>
-                          <a:cs typeface="Hanken Grotesk"/>
+                          <a:cs typeface="Arial"/>
                         </a:rPr>
                         <a:t>Экономия топлива</a:t>
                       </a:r>
@@ -42577,9 +42560,9 @@
                         <a:solidFill>
                           <a:schemeClr val="dk1"/>
                         </a:solidFill>
-                        <a:latin typeface="Hanken Grotesk"/>
+                        <a:latin typeface="Arial"/>
                         <a:ea typeface="Hanken Grotesk"/>
-                        <a:cs typeface="Hanken Grotesk"/>
+                        <a:cs typeface="Arial"/>
                         <a:sym typeface="Hanken Grotesk"/>
                       </a:endParaRPr>
                     </a:p>
@@ -42645,9 +42628,9 @@
                           <a:solidFill>
                             <a:schemeClr val="dk1"/>
                           </a:solidFill>
-                          <a:latin typeface="Hanken Grotesk"/>
+                          <a:latin typeface="Arial"/>
                           <a:ea typeface="Hanken Grotesk"/>
-                          <a:cs typeface="Hanken Grotesk"/>
+                          <a:cs typeface="Arial"/>
                         </a:rPr>
                         <a:t>Специальные предложения</a:t>
                       </a:r>
@@ -42655,9 +42638,9 @@
                         <a:solidFill>
                           <a:schemeClr val="dk1"/>
                         </a:solidFill>
-                        <a:latin typeface="Hanken Grotesk"/>
+                        <a:latin typeface="Arial"/>
                         <a:ea typeface="Hanken Grotesk"/>
-                        <a:cs typeface="Hanken Grotesk"/>
+                        <a:cs typeface="Arial"/>
                         <a:sym typeface="Hanken Grotesk"/>
                       </a:endParaRPr>
                     </a:p>
@@ -42726,10 +42709,15 @@
                           <a:solidFill>
                             <a:schemeClr val="dk1"/>
                           </a:solidFill>
+                          <a:latin typeface="Arial"/>
+                          <a:cs typeface="Arial"/>
                         </a:rPr>
                         <a:t>$23,000</a:t>
                       </a:r>
-                      <a:endParaRPr lang="ru-RU"/>
+                      <a:endParaRPr lang="ru-RU">
+                        <a:latin typeface="Arial"/>
+                        <a:cs typeface="Arial"/>
+                      </a:endParaRPr>
                     </a:p>
                   </a:txBody>
                   <a:tcPr marL="91425" marR="91425" marT="91425" marB="91425" anchor="ctr">
@@ -42793,9 +42781,9 @@
                           <a:solidFill>
                             <a:schemeClr val="dk1"/>
                           </a:solidFill>
-                          <a:latin typeface="Hanken Grotesk"/>
+                          <a:latin typeface="Arial"/>
                           <a:ea typeface="Hanken Grotesk"/>
-                          <a:cs typeface="Hanken Grotesk"/>
+                          <a:cs typeface="Arial"/>
                         </a:rPr>
                         <a:t>Нет</a:t>
                       </a:r>
@@ -42803,9 +42791,9 @@
                         <a:solidFill>
                           <a:schemeClr val="dk1"/>
                         </a:solidFill>
-                        <a:latin typeface="Hanken Grotesk"/>
+                        <a:latin typeface="Arial"/>
                         <a:ea typeface="Hanken Grotesk"/>
-                        <a:cs typeface="Hanken Grotesk"/>
+                        <a:cs typeface="Arial"/>
                         <a:sym typeface="Hanken Grotesk"/>
                       </a:endParaRPr>
                     </a:p>
@@ -42871,9 +42859,9 @@
                           <a:solidFill>
                             <a:schemeClr val="dk1"/>
                           </a:solidFill>
-                          <a:latin typeface="Hanken Grotesk"/>
+                          <a:latin typeface="Arial"/>
                           <a:ea typeface="Hanken Grotesk"/>
-                          <a:cs typeface="Hanken Grotesk"/>
+                          <a:cs typeface="Arial"/>
                         </a:rPr>
                         <a:t>Низкая</a:t>
                       </a:r>
@@ -42881,9 +42869,9 @@
                         <a:solidFill>
                           <a:schemeClr val="dk1"/>
                         </a:solidFill>
-                        <a:latin typeface="Hanken Grotesk"/>
+                        <a:latin typeface="Arial"/>
                         <a:ea typeface="Hanken Grotesk"/>
-                        <a:cs typeface="Hanken Grotesk"/>
+                        <a:cs typeface="Arial"/>
                         <a:sym typeface="Hanken Grotesk"/>
                       </a:endParaRPr>
                     </a:p>
@@ -42949,9 +42937,9 @@
                           <a:solidFill>
                             <a:schemeClr val="dk1"/>
                           </a:solidFill>
-                          <a:latin typeface="Hanken Grotesk"/>
+                          <a:latin typeface="Arial"/>
                           <a:ea typeface="Hanken Grotesk"/>
-                          <a:cs typeface="Hanken Grotesk"/>
+                          <a:cs typeface="Arial"/>
                         </a:rPr>
                         <a:t>21%</a:t>
                       </a:r>
@@ -42959,9 +42947,9 @@
                         <a:solidFill>
                           <a:schemeClr val="dk1"/>
                         </a:solidFill>
-                        <a:latin typeface="Hanken Grotesk"/>
+                        <a:latin typeface="Arial"/>
                         <a:ea typeface="Hanken Grotesk"/>
-                        <a:cs typeface="Hanken Grotesk"/>
+                        <a:cs typeface="Arial"/>
                         <a:sym typeface="Hanken Grotesk"/>
                       </a:endParaRPr>
                     </a:p>
@@ -43034,9 +43022,9 @@
                           <a:solidFill>
                             <a:srgbClr val="FFFFFF"/>
                           </a:solidFill>
-                          <a:latin typeface="Hanken Grotesk"/>
+                          <a:latin typeface="Arial"/>
                           <a:ea typeface="Hanken Grotesk"/>
-                          <a:cs typeface="Hanken Grotesk"/>
+                          <a:cs typeface="Arial"/>
                         </a:rPr>
                         <a:t>Компания</a:t>
                       </a:r>
@@ -43045,9 +43033,9 @@
                           <a:solidFill>
                             <a:schemeClr val="dk1"/>
                           </a:solidFill>
-                          <a:latin typeface="Hanken Grotesk"/>
+                          <a:latin typeface="Arial"/>
                           <a:ea typeface="Hanken Grotesk"/>
-                          <a:cs typeface="Hanken Grotesk"/>
+                          <a:cs typeface="Arial"/>
                         </a:rPr>
                         <a:t> </a:t>
                       </a:r>
@@ -43056,9 +43044,9 @@
                           <a:solidFill>
                             <a:schemeClr val="dk1"/>
                           </a:solidFill>
-                          <a:latin typeface="Hanken Grotesk"/>
+                          <a:latin typeface="Arial"/>
                           <a:ea typeface="Hanken Grotesk"/>
-                          <a:cs typeface="Hanken Grotesk"/>
+                          <a:cs typeface="Arial"/>
                           <a:sym typeface="Hanken Grotesk"/>
                         </a:rPr>
                         <a:t>B</a:t>
@@ -43067,9 +43055,9 @@
                         <a:solidFill>
                           <a:schemeClr val="dk1"/>
                         </a:solidFill>
-                        <a:latin typeface="Hanken Grotesk"/>
+                        <a:latin typeface="Arial"/>
                         <a:ea typeface="Hanken Grotesk"/>
-                        <a:cs typeface="Hanken Grotesk"/>
+                        <a:cs typeface="Arial"/>
                         <a:sym typeface="Hanken Grotesk"/>
                       </a:endParaRPr>
                     </a:p>
@@ -43134,9 +43122,9 @@
                         <a:solidFill>
                           <a:schemeClr val="dk1"/>
                         </a:solidFill>
-                        <a:latin typeface="Hanken Grotesk"/>
+                        <a:latin typeface="Arial"/>
                         <a:ea typeface="Hanken Grotesk"/>
-                        <a:cs typeface="Hanken Grotesk"/>
+                        <a:cs typeface="Arial"/>
                         <a:sym typeface="Hanken Grotesk"/>
                       </a:endParaRPr>
                     </a:p>
@@ -43201,9 +43189,9 @@
                         <a:solidFill>
                           <a:schemeClr val="dk1"/>
                         </a:solidFill>
-                        <a:latin typeface="Hanken Grotesk"/>
+                        <a:latin typeface="Arial"/>
                         <a:ea typeface="Hanken Grotesk"/>
-                        <a:cs typeface="Hanken Grotesk"/>
+                        <a:cs typeface="Arial"/>
                         <a:sym typeface="Hanken Grotesk"/>
                       </a:endParaRPr>
                     </a:p>
@@ -43268,9 +43256,9 @@
                         <a:solidFill>
                           <a:schemeClr val="dk1"/>
                         </a:solidFill>
-                        <a:latin typeface="Hanken Grotesk"/>
+                        <a:latin typeface="Arial"/>
                         <a:ea typeface="Hanken Grotesk"/>
-                        <a:cs typeface="Hanken Grotesk"/>
+                        <a:cs typeface="Arial"/>
                         <a:sym typeface="Hanken Grotesk"/>
                       </a:endParaRPr>
                     </a:p>
@@ -43335,9 +43323,9 @@
                         <a:solidFill>
                           <a:schemeClr val="dk1"/>
                         </a:solidFill>
-                        <a:latin typeface="Hanken Grotesk"/>
+                        <a:latin typeface="Arial"/>
                         <a:ea typeface="Hanken Grotesk"/>
-                        <a:cs typeface="Hanken Grotesk"/>
+                        <a:cs typeface="Arial"/>
                         <a:sym typeface="Hanken Grotesk"/>
                       </a:endParaRPr>
                     </a:p>
@@ -43402,9 +43390,9 @@
                         <a:solidFill>
                           <a:schemeClr val="dk1"/>
                         </a:solidFill>
-                        <a:latin typeface="Hanken Grotesk"/>
+                        <a:latin typeface="Arial"/>
                         <a:ea typeface="Hanken Grotesk"/>
-                        <a:cs typeface="Hanken Grotesk"/>
+                        <a:cs typeface="Arial"/>
                         <a:sym typeface="Hanken Grotesk"/>
                       </a:endParaRPr>
                     </a:p>
@@ -43469,9 +43457,9 @@
                         <a:solidFill>
                           <a:schemeClr val="dk1"/>
                         </a:solidFill>
-                        <a:latin typeface="Hanken Grotesk"/>
+                        <a:latin typeface="Arial"/>
                         <a:ea typeface="Hanken Grotesk"/>
-                        <a:cs typeface="Hanken Grotesk"/>
+                        <a:cs typeface="Arial"/>
                         <a:sym typeface="Hanken Grotesk"/>
                       </a:endParaRPr>
                     </a:p>
@@ -43544,9 +43532,9 @@
                           <a:solidFill>
                             <a:schemeClr val="dk1"/>
                           </a:solidFill>
-                          <a:latin typeface="Hanken Grotesk"/>
+                          <a:latin typeface="Arial"/>
                           <a:ea typeface="Hanken Grotesk"/>
-                          <a:cs typeface="Hanken Grotesk"/>
+                          <a:cs typeface="Arial"/>
                         </a:rPr>
                         <a:t>Компания</a:t>
                       </a:r>
@@ -43555,9 +43543,9 @@
                           <a:solidFill>
                             <a:schemeClr val="dk1"/>
                           </a:solidFill>
-                          <a:latin typeface="Hanken Grotesk"/>
+                          <a:latin typeface="Arial"/>
                           <a:ea typeface="Hanken Grotesk"/>
-                          <a:cs typeface="Hanken Grotesk"/>
+                          <a:cs typeface="Arial"/>
                         </a:rPr>
                         <a:t> </a:t>
                       </a:r>
@@ -43566,9 +43554,9 @@
                           <a:solidFill>
                             <a:schemeClr val="dk1"/>
                           </a:solidFill>
-                          <a:latin typeface="Hanken Grotesk"/>
+                          <a:latin typeface="Arial"/>
                           <a:ea typeface="Hanken Grotesk"/>
-                          <a:cs typeface="Hanken Grotesk"/>
+                          <a:cs typeface="Arial"/>
                           <a:sym typeface="Hanken Grotesk"/>
                         </a:rPr>
                         <a:t>C</a:t>
@@ -43577,9 +43565,9 @@
                         <a:solidFill>
                           <a:schemeClr val="dk1"/>
                         </a:solidFill>
-                        <a:latin typeface="Hanken Grotesk"/>
+                        <a:latin typeface="Arial"/>
                         <a:ea typeface="Hanken Grotesk"/>
-                        <a:cs typeface="Hanken Grotesk"/>
+                        <a:cs typeface="Arial"/>
                         <a:sym typeface="Hanken Grotesk"/>
                       </a:endParaRPr>
                     </a:p>
@@ -43644,9 +43632,9 @@
                         <a:solidFill>
                           <a:schemeClr val="dk1"/>
                         </a:solidFill>
-                        <a:latin typeface="Hanken Grotesk"/>
+                        <a:latin typeface="Arial"/>
                         <a:ea typeface="Hanken Grotesk"/>
-                        <a:cs typeface="Hanken Grotesk"/>
+                        <a:cs typeface="Arial"/>
                         <a:sym typeface="Hanken Grotesk"/>
                       </a:endParaRPr>
                     </a:p>
@@ -43711,9 +43699,9 @@
                         <a:solidFill>
                           <a:schemeClr val="dk1"/>
                         </a:solidFill>
-                        <a:latin typeface="Hanken Grotesk"/>
+                        <a:latin typeface="Arial"/>
                         <a:ea typeface="Hanken Grotesk"/>
-                        <a:cs typeface="Hanken Grotesk"/>
+                        <a:cs typeface="Arial"/>
                         <a:sym typeface="Hanken Grotesk"/>
                       </a:endParaRPr>
                     </a:p>
@@ -43778,9 +43766,9 @@
                         <a:solidFill>
                           <a:schemeClr val="dk1"/>
                         </a:solidFill>
-                        <a:latin typeface="Hanken Grotesk"/>
+                        <a:latin typeface="Arial"/>
                         <a:ea typeface="Hanken Grotesk"/>
-                        <a:cs typeface="Hanken Grotesk"/>
+                        <a:cs typeface="Arial"/>
                         <a:sym typeface="Hanken Grotesk"/>
                       </a:endParaRPr>
                     </a:p>
@@ -43845,9 +43833,9 @@
                         <a:solidFill>
                           <a:schemeClr val="dk1"/>
                         </a:solidFill>
-                        <a:latin typeface="Hanken Grotesk"/>
+                        <a:latin typeface="Arial"/>
                         <a:ea typeface="Hanken Grotesk"/>
-                        <a:cs typeface="Hanken Grotesk"/>
+                        <a:cs typeface="Arial"/>
                         <a:sym typeface="Hanken Grotesk"/>
                       </a:endParaRPr>
                     </a:p>
@@ -43912,9 +43900,9 @@
                         <a:solidFill>
                           <a:schemeClr val="dk1"/>
                         </a:solidFill>
-                        <a:latin typeface="Hanken Grotesk"/>
+                        <a:latin typeface="Arial"/>
                         <a:ea typeface="Hanken Grotesk"/>
-                        <a:cs typeface="Hanken Grotesk"/>
+                        <a:cs typeface="Arial"/>
                         <a:sym typeface="Hanken Grotesk"/>
                       </a:endParaRPr>
                     </a:p>
@@ -43979,9 +43967,9 @@
                         <a:solidFill>
                           <a:schemeClr val="dk1"/>
                         </a:solidFill>
-                        <a:latin typeface="Hanken Grotesk"/>
+                        <a:latin typeface="Arial"/>
                         <a:ea typeface="Hanken Grotesk"/>
-                        <a:cs typeface="Hanken Grotesk"/>
+                        <a:cs typeface="Arial"/>
                         <a:sym typeface="Hanken Grotesk"/>
                       </a:endParaRPr>
                     </a:p>
@@ -44054,9 +44042,9 @@
                           <a:solidFill>
                             <a:srgbClr val="FFFFFF"/>
                           </a:solidFill>
-                          <a:latin typeface="Hanken Grotesk"/>
+                          <a:latin typeface="Arial"/>
                           <a:ea typeface="Hanken Grotesk"/>
-                          <a:cs typeface="Hanken Grotesk"/>
+                          <a:cs typeface="Arial"/>
                         </a:rPr>
                         <a:t>Компания</a:t>
                       </a:r>
@@ -44065,9 +44053,9 @@
                           <a:solidFill>
                             <a:schemeClr val="dk1"/>
                           </a:solidFill>
-                          <a:latin typeface="Hanken Grotesk"/>
+                          <a:latin typeface="Arial"/>
                           <a:ea typeface="Hanken Grotesk"/>
-                          <a:cs typeface="Hanken Grotesk"/>
+                          <a:cs typeface="Arial"/>
                         </a:rPr>
                         <a:t> </a:t>
                       </a:r>
@@ -44076,9 +44064,9 @@
                           <a:solidFill>
                             <a:schemeClr val="dk1"/>
                           </a:solidFill>
-                          <a:latin typeface="Hanken Grotesk"/>
+                          <a:latin typeface="Arial"/>
                           <a:ea typeface="Hanken Grotesk"/>
-                          <a:cs typeface="Hanken Grotesk"/>
+                          <a:cs typeface="Arial"/>
                           <a:sym typeface="Hanken Grotesk"/>
                         </a:rPr>
                         <a:t>D</a:t>
@@ -44087,9 +44075,9 @@
                         <a:solidFill>
                           <a:schemeClr val="dk1"/>
                         </a:solidFill>
-                        <a:latin typeface="Hanken Grotesk"/>
+                        <a:latin typeface="Arial"/>
                         <a:ea typeface="Hanken Grotesk"/>
-                        <a:cs typeface="Hanken Grotesk"/>
+                        <a:cs typeface="Arial"/>
                         <a:sym typeface="Hanken Grotesk"/>
                       </a:endParaRPr>
                     </a:p>
@@ -44154,9 +44142,9 @@
                         <a:solidFill>
                           <a:schemeClr val="dk1"/>
                         </a:solidFill>
-                        <a:latin typeface="Hanken Grotesk"/>
+                        <a:latin typeface="Arial"/>
                         <a:ea typeface="Hanken Grotesk"/>
-                        <a:cs typeface="Hanken Grotesk"/>
+                        <a:cs typeface="Arial"/>
                         <a:sym typeface="Hanken Grotesk"/>
                       </a:endParaRPr>
                     </a:p>
@@ -44221,9 +44209,9 @@
                         <a:solidFill>
                           <a:schemeClr val="dk1"/>
                         </a:solidFill>
-                        <a:latin typeface="Hanken Grotesk"/>
+                        <a:latin typeface="Arial"/>
                         <a:ea typeface="Hanken Grotesk"/>
-                        <a:cs typeface="Hanken Grotesk"/>
+                        <a:cs typeface="Arial"/>
                         <a:sym typeface="Hanken Grotesk"/>
                       </a:endParaRPr>
                     </a:p>
@@ -44288,9 +44276,9 @@
                         <a:solidFill>
                           <a:schemeClr val="dk1"/>
                         </a:solidFill>
-                        <a:latin typeface="Hanken Grotesk"/>
+                        <a:latin typeface="Arial"/>
                         <a:ea typeface="Hanken Grotesk"/>
-                        <a:cs typeface="Hanken Grotesk"/>
+                        <a:cs typeface="Arial"/>
                         <a:sym typeface="Hanken Grotesk"/>
                       </a:endParaRPr>
                     </a:p>
@@ -44355,9 +44343,9 @@
                         <a:solidFill>
                           <a:schemeClr val="dk1"/>
                         </a:solidFill>
-                        <a:latin typeface="Hanken Grotesk"/>
+                        <a:latin typeface="Arial"/>
                         <a:ea typeface="Hanken Grotesk"/>
-                        <a:cs typeface="Hanken Grotesk"/>
+                        <a:cs typeface="Arial"/>
                         <a:sym typeface="Hanken Grotesk"/>
                       </a:endParaRPr>
                     </a:p>
@@ -44422,9 +44410,9 @@
                         <a:solidFill>
                           <a:schemeClr val="dk1"/>
                         </a:solidFill>
-                        <a:latin typeface="Hanken Grotesk"/>
+                        <a:latin typeface="Arial"/>
                         <a:ea typeface="Hanken Grotesk"/>
-                        <a:cs typeface="Hanken Grotesk"/>
+                        <a:cs typeface="Arial"/>
                         <a:sym typeface="Hanken Grotesk"/>
                       </a:endParaRPr>
                     </a:p>
@@ -44489,9 +44477,9 @@
                         <a:solidFill>
                           <a:schemeClr val="dk1"/>
                         </a:solidFill>
-                        <a:latin typeface="Hanken Grotesk"/>
+                        <a:latin typeface="Arial"/>
                         <a:ea typeface="Hanken Grotesk"/>
-                        <a:cs typeface="Hanken Grotesk"/>
+                        <a:cs typeface="Arial"/>
                         <a:sym typeface="Hanken Grotesk"/>
                       </a:endParaRPr>
                     </a:p>
@@ -44564,9 +44552,9 @@
                           <a:solidFill>
                             <a:srgbClr val="FFFFFF"/>
                           </a:solidFill>
-                          <a:latin typeface="Hanken Grotesk"/>
+                          <a:latin typeface="Arial"/>
                           <a:ea typeface="Hanken Grotesk"/>
-                          <a:cs typeface="Hanken Grotesk"/>
+                          <a:cs typeface="Arial"/>
                         </a:rPr>
                         <a:t>Компания</a:t>
                       </a:r>
@@ -44575,9 +44563,9 @@
                           <a:solidFill>
                             <a:schemeClr val="dk1"/>
                           </a:solidFill>
-                          <a:latin typeface="Hanken Grotesk"/>
+                          <a:latin typeface="Arial"/>
                           <a:ea typeface="Hanken Grotesk"/>
-                          <a:cs typeface="Hanken Grotesk"/>
+                          <a:cs typeface="Arial"/>
                         </a:rPr>
                         <a:t> </a:t>
                       </a:r>
@@ -44586,9 +44574,9 @@
                           <a:solidFill>
                             <a:schemeClr val="dk1"/>
                           </a:solidFill>
-                          <a:latin typeface="Hanken Grotesk"/>
+                          <a:latin typeface="Arial"/>
                           <a:ea typeface="Hanken Grotesk"/>
-                          <a:cs typeface="Hanken Grotesk"/>
+                          <a:cs typeface="Arial"/>
                           <a:sym typeface="Hanken Grotesk"/>
                         </a:rPr>
                         <a:t>E</a:t>
@@ -44597,9 +44585,9 @@
                         <a:solidFill>
                           <a:schemeClr val="dk1"/>
                         </a:solidFill>
-                        <a:latin typeface="Hanken Grotesk"/>
+                        <a:latin typeface="Arial"/>
                         <a:ea typeface="Hanken Grotesk"/>
-                        <a:cs typeface="Hanken Grotesk"/>
+                        <a:cs typeface="Arial"/>
                         <a:sym typeface="Hanken Grotesk"/>
                       </a:endParaRPr>
                     </a:p>
@@ -44664,9 +44652,9 @@
                         <a:solidFill>
                           <a:schemeClr val="dk1"/>
                         </a:solidFill>
-                        <a:latin typeface="Hanken Grotesk"/>
+                        <a:latin typeface="Arial"/>
                         <a:ea typeface="Hanken Grotesk"/>
-                        <a:cs typeface="Hanken Grotesk"/>
+                        <a:cs typeface="Arial"/>
                         <a:sym typeface="Hanken Grotesk"/>
                       </a:endParaRPr>
                     </a:p>
@@ -44731,9 +44719,9 @@
                         <a:solidFill>
                           <a:schemeClr val="dk1"/>
                         </a:solidFill>
-                        <a:latin typeface="Hanken Grotesk"/>
+                        <a:latin typeface="Arial"/>
                         <a:ea typeface="Hanken Grotesk"/>
-                        <a:cs typeface="Hanken Grotesk"/>
+                        <a:cs typeface="Arial"/>
                         <a:sym typeface="Hanken Grotesk"/>
                       </a:endParaRPr>
                     </a:p>
@@ -44798,9 +44786,9 @@
                         <a:solidFill>
                           <a:schemeClr val="dk1"/>
                         </a:solidFill>
-                        <a:latin typeface="Hanken Grotesk"/>
+                        <a:latin typeface="Arial"/>
                         <a:ea typeface="Hanken Grotesk"/>
-                        <a:cs typeface="Hanken Grotesk"/>
+                        <a:cs typeface="Arial"/>
                         <a:sym typeface="Hanken Grotesk"/>
                       </a:endParaRPr>
                     </a:p>
@@ -44865,9 +44853,9 @@
                         <a:solidFill>
                           <a:schemeClr val="dk1"/>
                         </a:solidFill>
-                        <a:latin typeface="Hanken Grotesk"/>
+                        <a:latin typeface="Arial"/>
                         <a:ea typeface="Hanken Grotesk"/>
-                        <a:cs typeface="Hanken Grotesk"/>
+                        <a:cs typeface="Arial"/>
                         <a:sym typeface="Hanken Grotesk"/>
                       </a:endParaRPr>
                     </a:p>
@@ -44932,9 +44920,9 @@
                         <a:solidFill>
                           <a:schemeClr val="dk1"/>
                         </a:solidFill>
-                        <a:latin typeface="Hanken Grotesk"/>
+                        <a:latin typeface="Arial"/>
                         <a:ea typeface="Hanken Grotesk"/>
-                        <a:cs typeface="Hanken Grotesk"/>
+                        <a:cs typeface="Arial"/>
                         <a:sym typeface="Hanken Grotesk"/>
                       </a:endParaRPr>
                     </a:p>
@@ -44999,9 +44987,9 @@
                         <a:solidFill>
                           <a:schemeClr val="dk1"/>
                         </a:solidFill>
-                        <a:latin typeface="Hanken Grotesk"/>
+                        <a:latin typeface="Arial"/>
                         <a:ea typeface="Hanken Grotesk"/>
-                        <a:cs typeface="Hanken Grotesk"/>
+                        <a:cs typeface="Arial"/>
                         <a:sym typeface="Hanken Grotesk"/>
                       </a:endParaRPr>
                     </a:p>
@@ -45074,9 +45062,9 @@
                           <a:solidFill>
                             <a:schemeClr val="dk1"/>
                           </a:solidFill>
-                          <a:latin typeface="Hanken Grotesk"/>
+                          <a:latin typeface="Arial"/>
                           <a:ea typeface="Hanken Grotesk"/>
-                          <a:cs typeface="Hanken Grotesk"/>
+                          <a:cs typeface="Arial"/>
                         </a:rPr>
                         <a:t>Компания</a:t>
                       </a:r>
@@ -45085,9 +45073,9 @@
                           <a:solidFill>
                             <a:schemeClr val="dk1"/>
                           </a:solidFill>
-                          <a:latin typeface="Hanken Grotesk"/>
+                          <a:latin typeface="Arial"/>
                           <a:ea typeface="Hanken Grotesk"/>
-                          <a:cs typeface="Hanken Grotesk"/>
+                          <a:cs typeface="Arial"/>
                           <a:sym typeface="Hanken Grotesk"/>
                         </a:rPr>
                         <a:t> F</a:t>
@@ -45096,9 +45084,9 @@
                         <a:solidFill>
                           <a:schemeClr val="dk1"/>
                         </a:solidFill>
-                        <a:latin typeface="Hanken Grotesk"/>
+                        <a:latin typeface="Arial"/>
                         <a:ea typeface="Hanken Grotesk"/>
-                        <a:cs typeface="Hanken Grotesk"/>
+                        <a:cs typeface="Arial"/>
                         <a:sym typeface="Hanken Grotesk"/>
                       </a:endParaRPr>
                     </a:p>
@@ -45163,9 +45151,9 @@
                         <a:solidFill>
                           <a:schemeClr val="dk1"/>
                         </a:solidFill>
-                        <a:latin typeface="Hanken Grotesk"/>
+                        <a:latin typeface="Arial"/>
                         <a:ea typeface="Hanken Grotesk"/>
-                        <a:cs typeface="Hanken Grotesk"/>
+                        <a:cs typeface="Arial"/>
                         <a:sym typeface="Hanken Grotesk"/>
                       </a:endParaRPr>
                     </a:p>
@@ -45230,9 +45218,9 @@
                         <a:solidFill>
                           <a:schemeClr val="dk1"/>
                         </a:solidFill>
-                        <a:latin typeface="Hanken Grotesk"/>
+                        <a:latin typeface="Arial"/>
                         <a:ea typeface="Hanken Grotesk"/>
-                        <a:cs typeface="Hanken Grotesk"/>
+                        <a:cs typeface="Arial"/>
                         <a:sym typeface="Hanken Grotesk"/>
                       </a:endParaRPr>
                     </a:p>
@@ -45297,9 +45285,9 @@
                         <a:solidFill>
                           <a:schemeClr val="dk1"/>
                         </a:solidFill>
-                        <a:latin typeface="Hanken Grotesk"/>
+                        <a:latin typeface="Arial"/>
                         <a:ea typeface="Hanken Grotesk"/>
-                        <a:cs typeface="Hanken Grotesk"/>
+                        <a:cs typeface="Arial"/>
                         <a:sym typeface="Hanken Grotesk"/>
                       </a:endParaRPr>
                     </a:p>
@@ -45364,9 +45352,9 @@
                         <a:solidFill>
                           <a:schemeClr val="dk1"/>
                         </a:solidFill>
-                        <a:latin typeface="Hanken Grotesk"/>
+                        <a:latin typeface="Arial"/>
                         <a:ea typeface="Hanken Grotesk"/>
-                        <a:cs typeface="Hanken Grotesk"/>
+                        <a:cs typeface="Arial"/>
                         <a:sym typeface="Hanken Grotesk"/>
                       </a:endParaRPr>
                     </a:p>
@@ -45431,9 +45419,9 @@
                         <a:solidFill>
                           <a:schemeClr val="dk1"/>
                         </a:solidFill>
-                        <a:latin typeface="Hanken Grotesk"/>
+                        <a:latin typeface="Arial"/>
                         <a:ea typeface="Hanken Grotesk"/>
-                        <a:cs typeface="Hanken Grotesk"/>
+                        <a:cs typeface="Arial"/>
                         <a:sym typeface="Hanken Grotesk"/>
                       </a:endParaRPr>
                     </a:p>
@@ -45498,9 +45486,9 @@
                         <a:solidFill>
                           <a:schemeClr val="dk1"/>
                         </a:solidFill>
-                        <a:latin typeface="Hanken Grotesk"/>
+                        <a:latin typeface="Arial"/>
                         <a:ea typeface="Hanken Grotesk"/>
-                        <a:cs typeface="Hanken Grotesk"/>
+                        <a:cs typeface="Arial"/>
                         <a:sym typeface="Hanken Grotesk"/>
                       </a:endParaRPr>
                     </a:p>
@@ -45573,9 +45561,9 @@
                           <a:solidFill>
                             <a:schemeClr val="dk1"/>
                           </a:solidFill>
-                          <a:latin typeface="Hanken Grotesk"/>
+                          <a:latin typeface="Arial"/>
                           <a:ea typeface="Hanken Grotesk"/>
-                          <a:cs typeface="Hanken Grotesk"/>
+                          <a:cs typeface="Arial"/>
                         </a:rPr>
                         <a:t>Компания</a:t>
                       </a:r>
@@ -45584,9 +45572,9 @@
                           <a:solidFill>
                             <a:schemeClr val="dk1"/>
                           </a:solidFill>
-                          <a:latin typeface="Hanken Grotesk"/>
+                          <a:latin typeface="Arial"/>
                           <a:ea typeface="Hanken Grotesk"/>
-                          <a:cs typeface="Hanken Grotesk"/>
+                          <a:cs typeface="Arial"/>
                           <a:sym typeface="Hanken Grotesk"/>
                         </a:rPr>
                         <a:t> G</a:t>
@@ -45595,9 +45583,9 @@
                         <a:solidFill>
                           <a:schemeClr val="dk1"/>
                         </a:solidFill>
-                        <a:latin typeface="Hanken Grotesk"/>
+                        <a:latin typeface="Arial"/>
                         <a:ea typeface="Hanken Grotesk"/>
-                        <a:cs typeface="Hanken Grotesk"/>
+                        <a:cs typeface="Arial"/>
                         <a:sym typeface="Hanken Grotesk"/>
                       </a:endParaRPr>
                     </a:p>
@@ -45662,9 +45650,9 @@
                         <a:solidFill>
                           <a:schemeClr val="dk1"/>
                         </a:solidFill>
-                        <a:latin typeface="Hanken Grotesk"/>
+                        <a:latin typeface="Arial"/>
                         <a:ea typeface="Hanken Grotesk"/>
-                        <a:cs typeface="Hanken Grotesk"/>
+                        <a:cs typeface="Arial"/>
                         <a:sym typeface="Hanken Grotesk"/>
                       </a:endParaRPr>
                     </a:p>
@@ -45729,9 +45717,9 @@
                         <a:solidFill>
                           <a:schemeClr val="dk1"/>
                         </a:solidFill>
-                        <a:latin typeface="Hanken Grotesk"/>
+                        <a:latin typeface="Arial"/>
                         <a:ea typeface="Hanken Grotesk"/>
-                        <a:cs typeface="Hanken Grotesk"/>
+                        <a:cs typeface="Arial"/>
                         <a:sym typeface="Hanken Grotesk"/>
                       </a:endParaRPr>
                     </a:p>
@@ -45796,9 +45784,9 @@
                         <a:solidFill>
                           <a:schemeClr val="dk1"/>
                         </a:solidFill>
-                        <a:latin typeface="Hanken Grotesk"/>
+                        <a:latin typeface="Arial"/>
                         <a:ea typeface="Hanken Grotesk"/>
-                        <a:cs typeface="Hanken Grotesk"/>
+                        <a:cs typeface="Arial"/>
                         <a:sym typeface="Hanken Grotesk"/>
                       </a:endParaRPr>
                     </a:p>
@@ -45863,9 +45851,9 @@
                         <a:solidFill>
                           <a:schemeClr val="dk1"/>
                         </a:solidFill>
-                        <a:latin typeface="Hanken Grotesk"/>
+                        <a:latin typeface="Arial"/>
                         <a:ea typeface="Hanken Grotesk"/>
-                        <a:cs typeface="Hanken Grotesk"/>
+                        <a:cs typeface="Arial"/>
                         <a:sym typeface="Hanken Grotesk"/>
                       </a:endParaRPr>
                     </a:p>
@@ -45930,9 +45918,9 @@
                         <a:solidFill>
                           <a:schemeClr val="dk1"/>
                         </a:solidFill>
-                        <a:latin typeface="Hanken Grotesk"/>
+                        <a:latin typeface="Arial"/>
                         <a:ea typeface="Hanken Grotesk"/>
-                        <a:cs typeface="Hanken Grotesk"/>
+                        <a:cs typeface="Arial"/>
                         <a:sym typeface="Hanken Grotesk"/>
                       </a:endParaRPr>
                     </a:p>
@@ -45997,9 +45985,9 @@
                         <a:solidFill>
                           <a:schemeClr val="dk1"/>
                         </a:solidFill>
-                        <a:latin typeface="Hanken Grotesk"/>
+                        <a:latin typeface="Arial"/>
                         <a:ea typeface="Hanken Grotesk"/>
-                        <a:cs typeface="Hanken Grotesk"/>
+                        <a:cs typeface="Arial"/>
                         <a:sym typeface="Hanken Grotesk"/>
                       </a:endParaRPr>
                     </a:p>

--- a/slides/slide_10.pptx
+++ b/slides/slide_10.pptx
@@ -861,7 +861,7 @@
           <a:bodyPr/>
           <a:lstStyle/>
           <a:p>
-            <a:fld id="{86A90248-2F55-4510-A851-1403E297A02B}" type="datetimeFigureOut">
+            <a:fld id="{A2751C9B-8E14-46E6-AC38-037A4571AE9E}" type="datetimeFigureOut">
               <a:rPr lang="en-US" smtClean="0"/>
               <a:t>11/7/2009</a:t>
             </a:fld>
@@ -1025,7 +1025,7 @@
           <a:bodyPr/>
           <a:lstStyle/>
           <a:p>
-            <a:fld id="{1E9B8D3C-1E24-4DD3-BFE3-57B687D104B6}" type="datetimeFigureOut">
+            <a:fld id="{FA91BC44-7F69-4FD5-AD0B-28FBF6623BFA}" type="datetimeFigureOut">
               <a:rPr lang="en-US" smtClean="0"/>
               <a:t>11/7/2009</a:t>
             </a:fld>
@@ -1189,7 +1189,7 @@
           <a:bodyPr/>
           <a:lstStyle/>
           <a:p>
-            <a:fld id="{455EB620-0AF0-4D24-A4FD-5E8A526A7BB2}" type="datetimeFigureOut">
+            <a:fld id="{80391146-4DF3-4816-8F63-AE2182B6EE14}" type="datetimeFigureOut">
               <a:rPr lang="en-US" smtClean="0"/>
               <a:t>11/7/2009</a:t>
             </a:fld>
@@ -13094,7 +13094,7 @@
           <a:bodyPr/>
           <a:lstStyle/>
           <a:p>
-            <a:fld id="{58F757D4-0DA2-44BC-B1AD-0746379C81CD}" type="datetimeFigureOut">
+            <a:fld id="{59B7ED80-C5A7-4FD7-A4A7-60398BBBE423}" type="datetimeFigureOut">
               <a:rPr lang="en-US" smtClean="0"/>
               <a:t>11/7/2009</a:t>
             </a:fld>
@@ -33195,7 +33195,7 @@
           <a:bodyPr/>
           <a:lstStyle/>
           <a:p>
-            <a:fld id="{4FEABF23-5D9D-47A5-9CE7-4BAE043F2B7D}" type="datetimeFigureOut">
+            <a:fld id="{0A6A88B6-B211-41E0-9C95-4FBE043DD334}" type="datetimeFigureOut">
               <a:rPr lang="en-US" smtClean="0"/>
               <a:t>11/7/2009</a:t>
             </a:fld>
@@ -38842,7 +38842,7 @@
           <a:bodyPr/>
           <a:lstStyle/>
           <a:p>
-            <a:fld id="{D74E97F7-5E70-4921-9C77-3ECAC79813B4}" type="datetimeFigureOut">
+            <a:fld id="{8463DE90-997D-4B0F-BEEA-3D118532EA22}" type="datetimeFigureOut">
               <a:rPr lang="en-US" smtClean="0"/>
               <a:t>11/7/2009</a:t>
             </a:fld>
@@ -39231,7 +39231,7 @@
           <a:bodyPr/>
           <a:lstStyle/>
           <a:p>
-            <a:fld id="{3508B06C-859A-4A51-B7C1-21DF2DF67FBA}" type="datetimeFigureOut">
+            <a:fld id="{A9139814-7CAD-4E82-89A3-C375C95ABA84}" type="datetimeFigureOut">
               <a:rPr lang="en-US" smtClean="0"/>
               <a:t>11/7/2009</a:t>
             </a:fld>
@@ -39344,7 +39344,7 @@
           <a:bodyPr/>
           <a:lstStyle/>
           <a:p>
-            <a:fld id="{86ACAE3F-28EF-4E83-AAB2-A7BCDDB9E1E4}" type="datetimeFigureOut">
+            <a:fld id="{ABD9116D-0D61-4E2E-8F14-F0EC8A82EF80}" type="datetimeFigureOut">
               <a:rPr lang="en-US" smtClean="0"/>
               <a:t>11/7/2009</a:t>
             </a:fld>
@@ -39434,7 +39434,7 @@
           <a:bodyPr/>
           <a:lstStyle/>
           <a:p>
-            <a:fld id="{5E35BF11-454A-4B5F-B05B-2B592EF60C52}" type="datetimeFigureOut">
+            <a:fld id="{34BFF963-0316-49F2-B255-A5CF9051574F}" type="datetimeFigureOut">
               <a:rPr lang="en-US" smtClean="0"/>
               <a:t>11/7/2009</a:t>
             </a:fld>
@@ -39689,7 +39689,7 @@
           <a:bodyPr/>
           <a:lstStyle/>
           <a:p>
-            <a:fld id="{BF6BF3C2-B64F-4AC5-AAA0-D1BF2A602062}" type="datetimeFigureOut">
+            <a:fld id="{2667C46A-CE51-4EB8-876E-D46D50171D1D}" type="datetimeFigureOut">
               <a:rPr lang="en-US" smtClean="0"/>
               <a:t>11/7/2009</a:t>
             </a:fld>
@@ -39921,7 +39921,7 @@
           <a:bodyPr/>
           <a:lstStyle/>
           <a:p>
-            <a:fld id="{81999541-AF74-486B-9AAB-9CFE58542EF1}" type="datetimeFigureOut">
+            <a:fld id="{8F6B5CD2-D7F6-43A8-A29A-4365AE9C1BDA}" type="datetimeFigureOut">
               <a:rPr lang="en-US" smtClean="0"/>
               <a:t>11/7/2009</a:t>
             </a:fld>
